--- a/dataset/guides_final/SYS/manual/IT-SYS-008-M_개발 서버·DB 장애 처리 매뉴얼.pptx
+++ b/dataset/guides_final/SYS/manual/IT-SYS-008-M_개발 서버·DB 장애 처리 매뉴얼.pptx
@@ -19028,7 +19028,7 @@
                 <a:ea typeface="Malgun Gothic"/>
                 <a:cs typeface="Malgun Gothic"/>
               </a:rPr>
-              <a:t>티켓: 담당자 조치가 필요한 건. 담당팀에 배정하고 상태를 RDY → IP → FIN → CLS 으로 관리한다.</a:t>
+              <a:t>티켓: 담당자 조치가 필요한 건. 담당팀에 배정하고 상태를 RDY → WIP → FIN → CLS 으로 관리한다.</a:t>
             </a:r>
           </a:p>
         </p:txBody>

--- a/dataset/guides_final/SYS/manual/IT-SYS-008-M_개발 서버·DB 장애 처리 매뉴얼.pptx
+++ b/dataset/guides_final/SYS/manual/IT-SYS-008-M_개발 서버·DB 장애 처리 매뉴얼.pptx
@@ -3231,7 +3231,7 @@
                 <a:ea typeface="Malgun Gothic"/>
                 <a:cs typeface="Malgun Gothic"/>
               </a:rPr>
-              <a:t>한화시스템 ICT IT 담당자 매뉴얼 · 사내 시스템</a:t>
+              <a:t>가상 ICT 기업 IT 담당자 매뉴얼 · 사내 시스템</a:t>
             </a:r>
           </a:p>
         </p:txBody>
@@ -3510,7 +3510,7 @@
                 <a:ea typeface="Malgun Gothic"/>
                 <a:cs typeface="Malgun Gothic"/>
               </a:rPr>
-              <a:t>© HANWHA SYSTEMS ICT · IT-SYS-008-M · 사내 제한</a:t>
+              <a:t>© 가상 ICT 기업 · IT-SYS-008-M · 사내 제한</a:t>
             </a:r>
           </a:p>
         </p:txBody>
@@ -6126,7 +6126,7 @@
                 <a:ea typeface="Malgun Gothic"/>
                 <a:cs typeface="Malgun Gothic"/>
               </a:rPr>
-              <a:t>© HANWHA SYSTEMS ICT · IT-SYS-008-M · 사내 제한</a:t>
+              <a:t>© 가상 ICT 기업 · IT-SYS-008-M · 사내 제한</a:t>
             </a:r>
           </a:p>
         </p:txBody>
@@ -8648,7 +8648,7 @@
                 <a:ea typeface="Malgun Gothic"/>
                 <a:cs typeface="Malgun Gothic"/>
               </a:rPr>
-              <a:t>© HANWHA SYSTEMS ICT · IT-SYS-008-M · 사내 제한</a:t>
+              <a:t>© 가상 ICT 기업 · IT-SYS-008-M · 사내 제한</a:t>
             </a:r>
           </a:p>
         </p:txBody>
@@ -8896,7 +8896,7 @@
                 <a:ea typeface="Malgun Gothic"/>
                 <a:cs typeface="Malgun Gothic"/>
               </a:rPr>
-              <a:t>© HANWHA SYSTEMS ICT · IT-SYS-008-M · 사내 제한</a:t>
+              <a:t>© 가상 ICT 기업 · IT-SYS-008-M · 사내 제한</a:t>
             </a:r>
           </a:p>
         </p:txBody>
@@ -9555,7 +9555,7 @@
                 <a:ea typeface="Malgun Gothic"/>
                 <a:cs typeface="Malgun Gothic"/>
               </a:rPr>
-              <a:t>© HANWHA SYSTEMS ICT · IT-SYS-008-M · 사내 제한</a:t>
+              <a:t>© 가상 ICT 기업 · IT-SYS-008-M · 사내 제한</a:t>
             </a:r>
           </a:p>
         </p:txBody>
@@ -9803,7 +9803,7 @@
                 <a:ea typeface="Malgun Gothic"/>
                 <a:cs typeface="Malgun Gothic"/>
               </a:rPr>
-              <a:t>© HANWHA SYSTEMS ICT · IT-SYS-008-M · 사내 제한</a:t>
+              <a:t>© 가상 ICT 기업 · IT-SYS-008-M · 사내 제한</a:t>
             </a:r>
           </a:p>
         </p:txBody>
@@ -10831,7 +10831,7 @@
                 <a:ea typeface="Malgun Gothic"/>
                 <a:cs typeface="Malgun Gothic"/>
               </a:rPr>
-              <a:t>© HANWHA SYSTEMS ICT · IT-SYS-008-M · 사내 제한</a:t>
+              <a:t>© 가상 ICT 기업 · IT-SYS-008-M · 사내 제한</a:t>
             </a:r>
           </a:p>
         </p:txBody>
@@ -11079,7 +11079,7 @@
                 <a:ea typeface="Malgun Gothic"/>
                 <a:cs typeface="Malgun Gothic"/>
               </a:rPr>
-              <a:t>© HANWHA SYSTEMS ICT · IT-SYS-008-M · 사내 제한</a:t>
+              <a:t>© 가상 ICT 기업 · IT-SYS-008-M · 사내 제한</a:t>
             </a:r>
           </a:p>
         </p:txBody>
@@ -11771,7 +11771,7 @@
                 <a:ea typeface="Malgun Gothic"/>
                 <a:cs typeface="Malgun Gothic"/>
               </a:rPr>
-              <a:t>© HANWHA SYSTEMS ICT · IT-SYS-008-M · 사내 제한</a:t>
+              <a:t>© 가상 ICT 기업 · IT-SYS-008-M · 사내 제한</a:t>
             </a:r>
           </a:p>
         </p:txBody>
@@ -12748,7 +12748,7 @@
                 <a:ea typeface="Malgun Gothic"/>
                 <a:cs typeface="Malgun Gothic"/>
               </a:rPr>
-              <a:t>© HANWHA SYSTEMS ICT · IT-SYS-008-M · 사내 제한</a:t>
+              <a:t>© 가상 ICT 기업 · IT-SYS-008-M · 사내 제한</a:t>
             </a:r>
           </a:p>
         </p:txBody>
@@ -14391,7 +14391,7 @@
                 <a:ea typeface="Malgun Gothic"/>
                 <a:cs typeface="Malgun Gothic"/>
               </a:rPr>
-              <a:t>© HANWHA SYSTEMS ICT · IT-SYS-008-M · 사내 제한</a:t>
+              <a:t>© 가상 ICT 기업 · IT-SYS-008-M · 사내 제한</a:t>
             </a:r>
           </a:p>
         </p:txBody>
@@ -15537,7 +15537,7 @@
                 <a:ea typeface="Malgun Gothic"/>
                 <a:cs typeface="Malgun Gothic"/>
               </a:rPr>
-              <a:t>© HANWHA SYSTEMS ICT · IT-SYS-008-M · 사내 제한</a:t>
+              <a:t>© 가상 ICT 기업 · IT-SYS-008-M · 사내 제한</a:t>
             </a:r>
           </a:p>
         </p:txBody>
@@ -15785,7 +15785,7 @@
                 <a:ea typeface="Malgun Gothic"/>
                 <a:cs typeface="Malgun Gothic"/>
               </a:rPr>
-              <a:t>© HANWHA SYSTEMS ICT · IT-SYS-008-M · 사내 제한</a:t>
+              <a:t>© 가상 ICT 기업 · IT-SYS-008-M · 사내 제한</a:t>
             </a:r>
           </a:p>
         </p:txBody>
@@ -16683,7 +16683,7 @@
                 <a:ea typeface="Malgun Gothic"/>
                 <a:cs typeface="Malgun Gothic"/>
               </a:rPr>
-              <a:t>© HANWHA SYSTEMS ICT · IT-SYS-008-M · 사내 제한</a:t>
+              <a:t>© 가상 ICT 기업 · IT-SYS-008-M · 사내 제한</a:t>
             </a:r>
           </a:p>
         </p:txBody>
@@ -16931,7 +16931,7 @@
                 <a:ea typeface="Malgun Gothic"/>
                 <a:cs typeface="Malgun Gothic"/>
               </a:rPr>
-              <a:t>© HANWHA SYSTEMS ICT · IT-SYS-008-M · 사내 제한</a:t>
+              <a:t>© 가상 ICT 기업 · IT-SYS-008-M · 사내 제한</a:t>
             </a:r>
           </a:p>
         </p:txBody>
@@ -19404,7 +19404,7 @@
                 <a:ea typeface="Malgun Gothic"/>
                 <a:cs typeface="Malgun Gothic"/>
               </a:rPr>
-              <a:t>© HANWHA SYSTEMS ICT · IT-SYS-008-M · 사내 제한</a:t>
+              <a:t>© 가상 ICT 기업 · IT-SYS-008-M · 사내 제한</a:t>
             </a:r>
           </a:p>
         </p:txBody>
@@ -19652,7 +19652,7 @@
                 <a:ea typeface="Malgun Gothic"/>
                 <a:cs typeface="Malgun Gothic"/>
               </a:rPr>
-              <a:t>© HANWHA SYSTEMS ICT · IT-SYS-008-M · 사내 제한</a:t>
+              <a:t>© 가상 ICT 기업 · IT-SYS-008-M · 사내 제한</a:t>
             </a:r>
           </a:p>
         </p:txBody>
@@ -22362,7 +22362,7 @@
                 <a:ea typeface="Malgun Gothic"/>
                 <a:cs typeface="Malgun Gothic"/>
               </a:rPr>
-              <a:t>© HANWHA SYSTEMS ICT · IT-SYS-008-M · 사내 제한</a:t>
+              <a:t>© 가상 ICT 기업 · IT-SYS-008-M · 사내 제한</a:t>
             </a:r>
           </a:p>
         </p:txBody>
